--- a/Docs/凌霄飞控电控框架.pptx
+++ b/Docs/凌霄飞控电控框架.pptx
@@ -6,7 +6,8 @@
   </p:sldMasterIdLst>
   <p:sldIdLst>
     <p:sldId id="257" r:id="rId2"/>
-    <p:sldId id="256" r:id="rId3"/>
+    <p:sldId id="259" r:id="rId3"/>
+    <p:sldId id="258" r:id="rId4"/>
   </p:sldIdLst>
   <p:sldSz cx="12192000" cy="6858000"/>
   <p:notesSz cx="6858000" cy="9144000"/>
@@ -105,6 +106,11 @@
       </a:defRPr>
     </a:lvl9pPr>
   </p:defaultTextStyle>
+  <p:extLst>
+    <p:ext uri="{EFAFB233-063F-42B5-8137-9DF3F51BA10A}">
+      <p15:sldGuideLst xmlns:p15="http://schemas.microsoft.com/office/powerpoint/2012/main"/>
+    </p:ext>
+  </p:extLst>
 </p:presentation>
 </file>
 
@@ -255,7 +261,7 @@
           <a:p>
             <a:fld id="{5AF0BAB8-3DC9-47B2-A9F3-F8ECA26F3694}" type="datetimeFigureOut">
               <a:rPr lang="zh-CN" altLang="en-US" smtClean="0"/>
-              <a:t>2026/6/18</a:t>
+              <a:t>2026/6/24</a:t>
             </a:fld>
             <a:endParaRPr lang="zh-CN" altLang="en-US"/>
           </a:p>
@@ -453,7 +459,7 @@
           <a:p>
             <a:fld id="{5AF0BAB8-3DC9-47B2-A9F3-F8ECA26F3694}" type="datetimeFigureOut">
               <a:rPr lang="zh-CN" altLang="en-US" smtClean="0"/>
-              <a:t>2026/6/18</a:t>
+              <a:t>2026/6/24</a:t>
             </a:fld>
             <a:endParaRPr lang="zh-CN" altLang="en-US"/>
           </a:p>
@@ -661,7 +667,7 @@
           <a:p>
             <a:fld id="{5AF0BAB8-3DC9-47B2-A9F3-F8ECA26F3694}" type="datetimeFigureOut">
               <a:rPr lang="zh-CN" altLang="en-US" smtClean="0"/>
-              <a:t>2026/6/18</a:t>
+              <a:t>2026/6/24</a:t>
             </a:fld>
             <a:endParaRPr lang="zh-CN" altLang="en-US"/>
           </a:p>
@@ -859,7 +865,7 @@
           <a:p>
             <a:fld id="{5AF0BAB8-3DC9-47B2-A9F3-F8ECA26F3694}" type="datetimeFigureOut">
               <a:rPr lang="zh-CN" altLang="en-US" smtClean="0"/>
-              <a:t>2026/6/18</a:t>
+              <a:t>2026/6/24</a:t>
             </a:fld>
             <a:endParaRPr lang="zh-CN" altLang="en-US"/>
           </a:p>
@@ -1134,7 +1140,7 @@
           <a:p>
             <a:fld id="{5AF0BAB8-3DC9-47B2-A9F3-F8ECA26F3694}" type="datetimeFigureOut">
               <a:rPr lang="zh-CN" altLang="en-US" smtClean="0"/>
-              <a:t>2026/6/18</a:t>
+              <a:t>2026/6/24</a:t>
             </a:fld>
             <a:endParaRPr lang="zh-CN" altLang="en-US"/>
           </a:p>
@@ -1399,7 +1405,7 @@
           <a:p>
             <a:fld id="{5AF0BAB8-3DC9-47B2-A9F3-F8ECA26F3694}" type="datetimeFigureOut">
               <a:rPr lang="zh-CN" altLang="en-US" smtClean="0"/>
-              <a:t>2026/6/18</a:t>
+              <a:t>2026/6/24</a:t>
             </a:fld>
             <a:endParaRPr lang="zh-CN" altLang="en-US"/>
           </a:p>
@@ -1811,7 +1817,7 @@
           <a:p>
             <a:fld id="{5AF0BAB8-3DC9-47B2-A9F3-F8ECA26F3694}" type="datetimeFigureOut">
               <a:rPr lang="zh-CN" altLang="en-US" smtClean="0"/>
-              <a:t>2026/6/18</a:t>
+              <a:t>2026/6/24</a:t>
             </a:fld>
             <a:endParaRPr lang="zh-CN" altLang="en-US"/>
           </a:p>
@@ -1952,7 +1958,7 @@
           <a:p>
             <a:fld id="{5AF0BAB8-3DC9-47B2-A9F3-F8ECA26F3694}" type="datetimeFigureOut">
               <a:rPr lang="zh-CN" altLang="en-US" smtClean="0"/>
-              <a:t>2026/6/18</a:t>
+              <a:t>2026/6/24</a:t>
             </a:fld>
             <a:endParaRPr lang="zh-CN" altLang="en-US"/>
           </a:p>
@@ -2065,7 +2071,7 @@
           <a:p>
             <a:fld id="{5AF0BAB8-3DC9-47B2-A9F3-F8ECA26F3694}" type="datetimeFigureOut">
               <a:rPr lang="zh-CN" altLang="en-US" smtClean="0"/>
-              <a:t>2026/6/18</a:t>
+              <a:t>2026/6/24</a:t>
             </a:fld>
             <a:endParaRPr lang="zh-CN" altLang="en-US"/>
           </a:p>
@@ -2376,7 +2382,7 @@
           <a:p>
             <a:fld id="{5AF0BAB8-3DC9-47B2-A9F3-F8ECA26F3694}" type="datetimeFigureOut">
               <a:rPr lang="zh-CN" altLang="en-US" smtClean="0"/>
-              <a:t>2026/6/18</a:t>
+              <a:t>2026/6/24</a:t>
             </a:fld>
             <a:endParaRPr lang="zh-CN" altLang="en-US"/>
           </a:p>
@@ -2664,7 +2670,7 @@
           <a:p>
             <a:fld id="{5AF0BAB8-3DC9-47B2-A9F3-F8ECA26F3694}" type="datetimeFigureOut">
               <a:rPr lang="zh-CN" altLang="en-US" smtClean="0"/>
-              <a:t>2026/6/18</a:t>
+              <a:t>2026/6/24</a:t>
             </a:fld>
             <a:endParaRPr lang="zh-CN" altLang="en-US"/>
           </a:p>
@@ -2905,7 +2911,7 @@
           <a:p>
             <a:fld id="{5AF0BAB8-3DC9-47B2-A9F3-F8ECA26F3694}" type="datetimeFigureOut">
               <a:rPr lang="zh-CN" altLang="en-US" smtClean="0"/>
-              <a:t>2026/6/18</a:t>
+              <a:t>2026/6/24</a:t>
             </a:fld>
             <a:endParaRPr lang="zh-CN" altLang="en-US"/>
           </a:p>
@@ -3345,7 +3351,7 @@
           <a:p>
             <a:r>
               <a:rPr lang="zh-CN" altLang="en-US" dirty="0"/>
-              <a:t>凌霄飞控电控框架</a:t>
+              <a:t>凌霄飞控硬件与电控框架</a:t>
             </a:r>
           </a:p>
         </p:txBody>
@@ -3415,6 +3421,34 @@
       </p:grpSpPr>
       <p:sp>
         <p:nvSpPr>
+          <p:cNvPr id="2" name="标题 1">
+            <a:extLst>
+              <a:ext uri="{FF2B5EF4-FFF2-40B4-BE49-F238E27FC236}">
+                <a16:creationId xmlns:a16="http://schemas.microsoft.com/office/drawing/2014/main" id="{01CEC1A1-DDE6-AB2D-D3A9-2867599B36AB}"/>
+              </a:ext>
+            </a:extLst>
+          </p:cNvPr>
+          <p:cNvSpPr>
+            <a:spLocks noGrp="1"/>
+          </p:cNvSpPr>
+          <p:nvPr>
+            <p:ph type="title"/>
+          </p:nvPr>
+        </p:nvSpPr>
+        <p:spPr/>
+        <p:txBody>
+          <a:bodyPr/>
+          <a:lstStyle/>
+          <a:p>
+            <a:r>
+              <a:rPr lang="zh-CN" altLang="en-US" dirty="0"/>
+              <a:t>电控框架</a:t>
+            </a:r>
+          </a:p>
+        </p:txBody>
+      </p:sp>
+      <p:sp>
+        <p:nvSpPr>
           <p:cNvPr id="4" name="矩形 3">
             <a:extLst>
               <a:ext uri="{FF2B5EF4-FFF2-40B4-BE49-F238E27FC236}">
@@ -3427,7 +3461,7 @@
         </p:nvSpPr>
         <p:spPr>
           <a:xfrm>
-            <a:off x="693472" y="4099458"/>
+            <a:off x="838200" y="4479946"/>
             <a:ext cx="3547134" cy="1841074"/>
           </a:xfrm>
           <a:prstGeom prst="rect">
@@ -3471,7 +3505,7 @@
         </p:nvSpPr>
         <p:spPr>
           <a:xfrm>
-            <a:off x="821835" y="4295839"/>
+            <a:off x="966563" y="4676327"/>
             <a:ext cx="938948" cy="429584"/>
           </a:xfrm>
           <a:prstGeom prst="rect">
@@ -3521,7 +3555,7 @@
         </p:nvSpPr>
         <p:spPr>
           <a:xfrm>
-            <a:off x="1863572" y="4295839"/>
+            <a:off x="2008300" y="4676327"/>
             <a:ext cx="938948" cy="429584"/>
           </a:xfrm>
           <a:prstGeom prst="rect">
@@ -3571,7 +3605,7 @@
         </p:nvSpPr>
         <p:spPr>
           <a:xfrm>
-            <a:off x="821835" y="4903393"/>
+            <a:off x="966563" y="5283881"/>
             <a:ext cx="1333757" cy="429584"/>
           </a:xfrm>
           <a:prstGeom prst="rect">
@@ -3620,7 +3654,7 @@
         </p:nvSpPr>
         <p:spPr>
           <a:xfrm>
-            <a:off x="699608" y="2532499"/>
+            <a:off x="844336" y="2912987"/>
             <a:ext cx="7499308" cy="1338870"/>
           </a:xfrm>
           <a:prstGeom prst="rect">
@@ -3664,7 +3698,7 @@
         </p:nvSpPr>
         <p:spPr>
           <a:xfrm>
-            <a:off x="4449262" y="4099458"/>
+            <a:off x="4593990" y="4479946"/>
             <a:ext cx="3743517" cy="1841074"/>
           </a:xfrm>
           <a:prstGeom prst="rect">
@@ -3708,7 +3742,7 @@
         </p:nvSpPr>
         <p:spPr>
           <a:xfrm>
-            <a:off x="4617509" y="4295839"/>
+            <a:off x="4762237" y="4676327"/>
             <a:ext cx="938948" cy="429584"/>
           </a:xfrm>
           <a:prstGeom prst="rect">
@@ -3756,7 +3790,7 @@
         </p:nvSpPr>
         <p:spPr>
           <a:xfrm>
-            <a:off x="5696597" y="4295839"/>
+            <a:off x="5841325" y="4676327"/>
             <a:ext cx="938948" cy="429584"/>
           </a:xfrm>
           <a:prstGeom prst="rect">
@@ -3804,7 +3838,7 @@
         </p:nvSpPr>
         <p:spPr>
           <a:xfrm>
-            <a:off x="6775685" y="4295839"/>
+            <a:off x="6920413" y="4676327"/>
             <a:ext cx="938948" cy="429584"/>
           </a:xfrm>
           <a:prstGeom prst="rect">
@@ -3852,7 +3886,7 @@
         </p:nvSpPr>
         <p:spPr>
           <a:xfrm>
-            <a:off x="852008" y="2684899"/>
+            <a:off x="996736" y="3065387"/>
             <a:ext cx="1956649" cy="419356"/>
           </a:xfrm>
           <a:prstGeom prst="rect">
@@ -3900,7 +3934,7 @@
         </p:nvSpPr>
         <p:spPr>
           <a:xfrm>
-            <a:off x="2961057" y="2684899"/>
+            <a:off x="3105785" y="3065387"/>
             <a:ext cx="1956649" cy="419356"/>
           </a:xfrm>
           <a:prstGeom prst="rect">
@@ -3948,7 +3982,7 @@
         </p:nvSpPr>
         <p:spPr>
           <a:xfrm>
-            <a:off x="5070106" y="2684899"/>
+            <a:off x="5214834" y="3065387"/>
             <a:ext cx="1956649" cy="419356"/>
           </a:xfrm>
           <a:prstGeom prst="rect">
@@ -3996,7 +4030,7 @@
         </p:nvSpPr>
         <p:spPr>
           <a:xfrm>
-            <a:off x="852008" y="3243358"/>
+            <a:off x="996736" y="3623846"/>
             <a:ext cx="1956649" cy="419356"/>
           </a:xfrm>
           <a:prstGeom prst="rect">
@@ -4044,7 +4078,7 @@
         </p:nvSpPr>
         <p:spPr>
           <a:xfrm>
-            <a:off x="2961057" y="3243358"/>
+            <a:off x="3105785" y="3623846"/>
             <a:ext cx="1956649" cy="419356"/>
           </a:xfrm>
           <a:prstGeom prst="rect">
@@ -4092,7 +4126,7 @@
         </p:nvSpPr>
         <p:spPr>
           <a:xfrm>
-            <a:off x="699608" y="1525023"/>
+            <a:off x="844336" y="1905511"/>
             <a:ext cx="7499308" cy="832574"/>
           </a:xfrm>
           <a:prstGeom prst="rect">
@@ -4122,10 +4156,1768 @@
           </a:p>
         </p:txBody>
       </p:sp>
+      <p:sp>
+        <p:nvSpPr>
+          <p:cNvPr id="19" name="矩形 18">
+            <a:extLst>
+              <a:ext uri="{FF2B5EF4-FFF2-40B4-BE49-F238E27FC236}">
+                <a16:creationId xmlns:a16="http://schemas.microsoft.com/office/drawing/2014/main" id="{9BABE313-CEEF-E5C5-FEEB-4B552ED1EADB}"/>
+              </a:ext>
+            </a:extLst>
+          </p:cNvPr>
+          <p:cNvSpPr/>
+          <p:nvPr/>
+        </p:nvSpPr>
+        <p:spPr>
+          <a:xfrm>
+            <a:off x="966563" y="2026188"/>
+            <a:ext cx="1956649" cy="406059"/>
+          </a:xfrm>
+          <a:prstGeom prst="rect">
+            <a:avLst/>
+          </a:prstGeom>
+        </p:spPr>
+        <p:style>
+          <a:lnRef idx="2">
+            <a:schemeClr val="accent5"/>
+          </a:lnRef>
+          <a:fillRef idx="1">
+            <a:schemeClr val="lt1"/>
+          </a:fillRef>
+          <a:effectRef idx="0">
+            <a:schemeClr val="accent5"/>
+          </a:effectRef>
+          <a:fontRef idx="minor">
+            <a:schemeClr val="dk1"/>
+          </a:fontRef>
+        </p:style>
+        <p:txBody>
+          <a:bodyPr rtlCol="0" anchor="ctr"/>
+          <a:lstStyle/>
+          <a:p>
+            <a:pPr algn="ctr"/>
+            <a:r>
+              <a:rPr lang="en-US" altLang="zh-CN" dirty="0" err="1"/>
+              <a:t>Set_Speed_X</a:t>
+            </a:r>
+            <a:endParaRPr lang="zh-CN" altLang="en-US" dirty="0"/>
+          </a:p>
+        </p:txBody>
+      </p:sp>
+      <p:sp>
+        <p:nvSpPr>
+          <p:cNvPr id="20" name="矩形 19">
+            <a:extLst>
+              <a:ext uri="{FF2B5EF4-FFF2-40B4-BE49-F238E27FC236}">
+                <a16:creationId xmlns:a16="http://schemas.microsoft.com/office/drawing/2014/main" id="{9F71448B-C704-238E-8C8B-2DA1B97D1464}"/>
+              </a:ext>
+            </a:extLst>
+          </p:cNvPr>
+          <p:cNvSpPr/>
+          <p:nvPr/>
+        </p:nvSpPr>
+        <p:spPr>
+          <a:xfrm>
+            <a:off x="3105785" y="2026188"/>
+            <a:ext cx="1956649" cy="406059"/>
+          </a:xfrm>
+          <a:prstGeom prst="rect">
+            <a:avLst/>
+          </a:prstGeom>
+        </p:spPr>
+        <p:style>
+          <a:lnRef idx="2">
+            <a:schemeClr val="accent5"/>
+          </a:lnRef>
+          <a:fillRef idx="1">
+            <a:schemeClr val="lt1"/>
+          </a:fillRef>
+          <a:effectRef idx="0">
+            <a:schemeClr val="accent5"/>
+          </a:effectRef>
+          <a:fontRef idx="minor">
+            <a:schemeClr val="dk1"/>
+          </a:fontRef>
+        </p:style>
+        <p:txBody>
+          <a:bodyPr rtlCol="0" anchor="ctr"/>
+          <a:lstStyle/>
+          <a:p>
+            <a:pPr algn="ctr"/>
+            <a:r>
+              <a:rPr lang="en-US" altLang="zh-CN" dirty="0" err="1"/>
+              <a:t>Set_Speed_Y</a:t>
+            </a:r>
+            <a:endParaRPr lang="zh-CN" altLang="en-US" dirty="0"/>
+          </a:p>
+        </p:txBody>
+      </p:sp>
+      <p:sp>
+        <p:nvSpPr>
+          <p:cNvPr id="21" name="矩形 20">
+            <a:extLst>
+              <a:ext uri="{FF2B5EF4-FFF2-40B4-BE49-F238E27FC236}">
+                <a16:creationId xmlns:a16="http://schemas.microsoft.com/office/drawing/2014/main" id="{32701A4A-276F-6312-D627-12939BC57FBF}"/>
+              </a:ext>
+            </a:extLst>
+          </p:cNvPr>
+          <p:cNvSpPr/>
+          <p:nvPr/>
+        </p:nvSpPr>
+        <p:spPr>
+          <a:xfrm>
+            <a:off x="5245007" y="2026187"/>
+            <a:ext cx="1956649" cy="406059"/>
+          </a:xfrm>
+          <a:prstGeom prst="rect">
+            <a:avLst/>
+          </a:prstGeom>
+        </p:spPr>
+        <p:style>
+          <a:lnRef idx="2">
+            <a:schemeClr val="accent5"/>
+          </a:lnRef>
+          <a:fillRef idx="1">
+            <a:schemeClr val="lt1"/>
+          </a:fillRef>
+          <a:effectRef idx="0">
+            <a:schemeClr val="accent5"/>
+          </a:effectRef>
+          <a:fontRef idx="minor">
+            <a:schemeClr val="dk1"/>
+          </a:fontRef>
+        </p:style>
+        <p:txBody>
+          <a:bodyPr rtlCol="0" anchor="ctr"/>
+          <a:lstStyle/>
+          <a:p>
+            <a:pPr algn="ctr"/>
+            <a:r>
+              <a:rPr lang="en-US" altLang="zh-CN" dirty="0" err="1"/>
+              <a:t>Set_Speed_Z</a:t>
+            </a:r>
+            <a:endParaRPr lang="zh-CN" altLang="en-US" dirty="0"/>
+          </a:p>
+        </p:txBody>
+      </p:sp>
+      <p:sp>
+        <p:nvSpPr>
+          <p:cNvPr id="22" name="文本框 21">
+            <a:extLst>
+              <a:ext uri="{FF2B5EF4-FFF2-40B4-BE49-F238E27FC236}">
+                <a16:creationId xmlns:a16="http://schemas.microsoft.com/office/drawing/2014/main" id="{297B19FC-AFF7-C0AF-B4AB-D83FD3E3B54F}"/>
+              </a:ext>
+            </a:extLst>
+          </p:cNvPr>
+          <p:cNvSpPr txBox="1"/>
+          <p:nvPr/>
+        </p:nvSpPr>
+        <p:spPr>
+          <a:xfrm>
+            <a:off x="2173185" y="6364443"/>
+            <a:ext cx="877163" cy="369332"/>
+          </a:xfrm>
+          <a:prstGeom prst="rect">
+            <a:avLst/>
+          </a:prstGeom>
+          <a:noFill/>
+        </p:spPr>
+        <p:txBody>
+          <a:bodyPr wrap="none" rtlCol="0">
+            <a:spAutoFit/>
+          </a:bodyPr>
+          <a:lstStyle/>
+          <a:p>
+            <a:pPr algn="ctr"/>
+            <a:r>
+              <a:rPr lang="zh-CN" altLang="en-US" dirty="0"/>
+              <a:t>算法层</a:t>
+            </a:r>
+          </a:p>
+        </p:txBody>
+      </p:sp>
+      <p:sp>
+        <p:nvSpPr>
+          <p:cNvPr id="23" name="文本框 22">
+            <a:extLst>
+              <a:ext uri="{FF2B5EF4-FFF2-40B4-BE49-F238E27FC236}">
+                <a16:creationId xmlns:a16="http://schemas.microsoft.com/office/drawing/2014/main" id="{294A477A-17AF-5F37-82E8-C6FC9F85846C}"/>
+              </a:ext>
+            </a:extLst>
+          </p:cNvPr>
+          <p:cNvSpPr txBox="1"/>
+          <p:nvPr/>
+        </p:nvSpPr>
+        <p:spPr>
+          <a:xfrm>
+            <a:off x="5454638" y="6373648"/>
+            <a:ext cx="1712328" cy="369332"/>
+          </a:xfrm>
+          <a:prstGeom prst="rect">
+            <a:avLst/>
+          </a:prstGeom>
+          <a:noFill/>
+        </p:spPr>
+        <p:txBody>
+          <a:bodyPr wrap="none" rtlCol="0">
+            <a:spAutoFit/>
+          </a:bodyPr>
+          <a:lstStyle/>
+          <a:p>
+            <a:pPr algn="ctr"/>
+            <a:r>
+              <a:rPr lang="zh-CN" altLang="en-US" dirty="0"/>
+              <a:t>驱动层（</a:t>
+            </a:r>
+            <a:r>
+              <a:rPr lang="en-US" altLang="zh-CN" dirty="0"/>
+              <a:t>BSP</a:t>
+            </a:r>
+            <a:r>
+              <a:rPr lang="zh-CN" altLang="en-US" dirty="0"/>
+              <a:t>）</a:t>
+            </a:r>
+          </a:p>
+        </p:txBody>
+      </p:sp>
+      <p:sp>
+        <p:nvSpPr>
+          <p:cNvPr id="24" name="文本框 23">
+            <a:extLst>
+              <a:ext uri="{FF2B5EF4-FFF2-40B4-BE49-F238E27FC236}">
+                <a16:creationId xmlns:a16="http://schemas.microsoft.com/office/drawing/2014/main" id="{2598E26B-52EB-DD88-73BB-27C68F07CAE3}"/>
+              </a:ext>
+            </a:extLst>
+          </p:cNvPr>
+          <p:cNvSpPr txBox="1"/>
+          <p:nvPr/>
+        </p:nvSpPr>
+        <p:spPr>
+          <a:xfrm>
+            <a:off x="8356221" y="3300077"/>
+            <a:ext cx="877163" cy="369332"/>
+          </a:xfrm>
+          <a:prstGeom prst="rect">
+            <a:avLst/>
+          </a:prstGeom>
+          <a:noFill/>
+        </p:spPr>
+        <p:txBody>
+          <a:bodyPr wrap="none" rtlCol="0">
+            <a:spAutoFit/>
+          </a:bodyPr>
+          <a:lstStyle/>
+          <a:p>
+            <a:pPr algn="ctr"/>
+            <a:r>
+              <a:rPr lang="zh-CN" altLang="en-US" dirty="0"/>
+              <a:t>设备层</a:t>
+            </a:r>
+          </a:p>
+        </p:txBody>
+      </p:sp>
+      <p:sp>
+        <p:nvSpPr>
+          <p:cNvPr id="25" name="文本框 24">
+            <a:extLst>
+              <a:ext uri="{FF2B5EF4-FFF2-40B4-BE49-F238E27FC236}">
+                <a16:creationId xmlns:a16="http://schemas.microsoft.com/office/drawing/2014/main" id="{77460987-474C-6261-C276-301C0F0D627D}"/>
+              </a:ext>
+            </a:extLst>
+          </p:cNvPr>
+          <p:cNvSpPr txBox="1"/>
+          <p:nvPr/>
+        </p:nvSpPr>
+        <p:spPr>
+          <a:xfrm>
+            <a:off x="8356222" y="2079278"/>
+            <a:ext cx="877163" cy="369332"/>
+          </a:xfrm>
+          <a:prstGeom prst="rect">
+            <a:avLst/>
+          </a:prstGeom>
+          <a:noFill/>
+        </p:spPr>
+        <p:txBody>
+          <a:bodyPr wrap="none" rtlCol="0">
+            <a:spAutoFit/>
+          </a:bodyPr>
+          <a:lstStyle/>
+          <a:p>
+            <a:pPr algn="ctr"/>
+            <a:r>
+              <a:rPr lang="zh-CN" altLang="en-US" dirty="0"/>
+              <a:t>交互层</a:t>
+            </a:r>
+          </a:p>
+        </p:txBody>
+      </p:sp>
     </p:spTree>
     <p:extLst>
       <p:ext uri="{BB962C8B-B14F-4D97-AF65-F5344CB8AC3E}">
-        <p14:creationId xmlns:p14="http://schemas.microsoft.com/office/powerpoint/2010/main" val="4219369130"/>
+        <p14:creationId xmlns:p14="http://schemas.microsoft.com/office/powerpoint/2010/main" val="1077073452"/>
+      </p:ext>
+    </p:extLst>
+  </p:cSld>
+  <p:clrMapOvr>
+    <a:masterClrMapping/>
+  </p:clrMapOvr>
+</p:sld>
+</file>
+
+<file path=ppt/slides/slide3.xml><?xml version="1.0" encoding="utf-8"?>
+<p:sld xmlns:a="http://schemas.openxmlformats.org/drawingml/2006/main" xmlns:r="http://schemas.openxmlformats.org/officeDocument/2006/relationships" xmlns:p="http://schemas.openxmlformats.org/presentationml/2006/main">
+  <p:cSld>
+    <p:spTree>
+      <p:nvGrpSpPr>
+        <p:cNvPr id="1" name=""/>
+        <p:cNvGrpSpPr/>
+        <p:nvPr/>
+      </p:nvGrpSpPr>
+      <p:grpSpPr>
+        <a:xfrm>
+          <a:off x="0" y="0"/>
+          <a:ext cx="0" cy="0"/>
+          <a:chOff x="0" y="0"/>
+          <a:chExt cx="0" cy="0"/>
+        </a:xfrm>
+      </p:grpSpPr>
+      <p:sp>
+        <p:nvSpPr>
+          <p:cNvPr id="2" name="标题 1">
+            <a:extLst>
+              <a:ext uri="{FF2B5EF4-FFF2-40B4-BE49-F238E27FC236}">
+                <a16:creationId xmlns:a16="http://schemas.microsoft.com/office/drawing/2014/main" id="{3BD696AE-D4C5-01DF-E8DA-E637FD845256}"/>
+              </a:ext>
+            </a:extLst>
+          </p:cNvPr>
+          <p:cNvSpPr>
+            <a:spLocks noGrp="1"/>
+          </p:cNvSpPr>
+          <p:nvPr>
+            <p:ph type="title"/>
+          </p:nvPr>
+        </p:nvSpPr>
+        <p:spPr/>
+        <p:txBody>
+          <a:bodyPr/>
+          <a:lstStyle/>
+          <a:p>
+            <a:r>
+              <a:rPr lang="zh-CN" altLang="en-US" dirty="0"/>
+              <a:t>电源树</a:t>
+            </a:r>
+          </a:p>
+        </p:txBody>
+      </p:sp>
+      <p:sp>
+        <p:nvSpPr>
+          <p:cNvPr id="4" name="矩形 3">
+            <a:extLst>
+              <a:ext uri="{FF2B5EF4-FFF2-40B4-BE49-F238E27FC236}">
+                <a16:creationId xmlns:a16="http://schemas.microsoft.com/office/drawing/2014/main" id="{4B7BE783-CA39-CB7D-EA2F-0313D01CDA3D}"/>
+              </a:ext>
+            </a:extLst>
+          </p:cNvPr>
+          <p:cNvSpPr/>
+          <p:nvPr/>
+        </p:nvSpPr>
+        <p:spPr>
+          <a:xfrm>
+            <a:off x="7480898" y="2528408"/>
+            <a:ext cx="2019044" cy="533911"/>
+          </a:xfrm>
+          <a:prstGeom prst="rect">
+            <a:avLst/>
+          </a:prstGeom>
+          <a:ln/>
+        </p:spPr>
+        <p:style>
+          <a:lnRef idx="2">
+            <a:schemeClr val="accent4"/>
+          </a:lnRef>
+          <a:fillRef idx="1">
+            <a:schemeClr val="lt1"/>
+          </a:fillRef>
+          <a:effectRef idx="0">
+            <a:schemeClr val="accent4"/>
+          </a:effectRef>
+          <a:fontRef idx="minor">
+            <a:schemeClr val="dk1"/>
+          </a:fontRef>
+        </p:style>
+        <p:txBody>
+          <a:bodyPr rtlCol="0" anchor="ctr"/>
+          <a:lstStyle/>
+          <a:p>
+            <a:pPr algn="ctr"/>
+            <a:r>
+              <a:rPr lang="zh-CN" altLang="en-US" dirty="0"/>
+              <a:t>激光雷达</a:t>
+            </a:r>
+          </a:p>
+        </p:txBody>
+      </p:sp>
+      <p:sp>
+        <p:nvSpPr>
+          <p:cNvPr id="5" name="矩形 4">
+            <a:extLst>
+              <a:ext uri="{FF2B5EF4-FFF2-40B4-BE49-F238E27FC236}">
+                <a16:creationId xmlns:a16="http://schemas.microsoft.com/office/drawing/2014/main" id="{18F9D615-AC8B-56B9-994D-4577F06525BB}"/>
+              </a:ext>
+            </a:extLst>
+          </p:cNvPr>
+          <p:cNvSpPr/>
+          <p:nvPr/>
+        </p:nvSpPr>
+        <p:spPr>
+          <a:xfrm>
+            <a:off x="7480898" y="3239267"/>
+            <a:ext cx="2019044" cy="533911"/>
+          </a:xfrm>
+          <a:prstGeom prst="rect">
+            <a:avLst/>
+          </a:prstGeom>
+          <a:ln/>
+        </p:spPr>
+        <p:style>
+          <a:lnRef idx="2">
+            <a:schemeClr val="accent4"/>
+          </a:lnRef>
+          <a:fillRef idx="1">
+            <a:schemeClr val="lt1"/>
+          </a:fillRef>
+          <a:effectRef idx="0">
+            <a:schemeClr val="accent4"/>
+          </a:effectRef>
+          <a:fontRef idx="minor">
+            <a:schemeClr val="dk1"/>
+          </a:fontRef>
+        </p:style>
+        <p:txBody>
+          <a:bodyPr rtlCol="0" anchor="ctr"/>
+          <a:lstStyle/>
+          <a:p>
+            <a:pPr algn="ctr"/>
+            <a:r>
+              <a:rPr lang="en-US" altLang="zh-CN" dirty="0"/>
+              <a:t>Jetson Nano</a:t>
+            </a:r>
+            <a:endParaRPr lang="zh-CN" altLang="en-US" dirty="0"/>
+          </a:p>
+        </p:txBody>
+      </p:sp>
+      <p:sp>
+        <p:nvSpPr>
+          <p:cNvPr id="6" name="矩形 5">
+            <a:extLst>
+              <a:ext uri="{FF2B5EF4-FFF2-40B4-BE49-F238E27FC236}">
+                <a16:creationId xmlns:a16="http://schemas.microsoft.com/office/drawing/2014/main" id="{C088ABB0-4823-2C4E-50B8-9FC56071DD8E}"/>
+              </a:ext>
+            </a:extLst>
+          </p:cNvPr>
+          <p:cNvSpPr/>
+          <p:nvPr/>
+        </p:nvSpPr>
+        <p:spPr>
+          <a:xfrm>
+            <a:off x="7480898" y="3950126"/>
+            <a:ext cx="2019044" cy="533911"/>
+          </a:xfrm>
+          <a:prstGeom prst="rect">
+            <a:avLst/>
+          </a:prstGeom>
+          <a:ln/>
+        </p:spPr>
+        <p:style>
+          <a:lnRef idx="2">
+            <a:schemeClr val="accent4"/>
+          </a:lnRef>
+          <a:fillRef idx="1">
+            <a:schemeClr val="lt1"/>
+          </a:fillRef>
+          <a:effectRef idx="0">
+            <a:schemeClr val="accent4"/>
+          </a:effectRef>
+          <a:fontRef idx="minor">
+            <a:schemeClr val="dk1"/>
+          </a:fontRef>
+        </p:style>
+        <p:txBody>
+          <a:bodyPr rtlCol="0" anchor="ctr"/>
+          <a:lstStyle/>
+          <a:p>
+            <a:pPr algn="ctr"/>
+            <a:r>
+              <a:rPr lang="zh-CN" altLang="en-US" dirty="0"/>
+              <a:t>凌霄</a:t>
+            </a:r>
+            <a:r>
+              <a:rPr lang="en-US" altLang="zh-CN" dirty="0"/>
+              <a:t>IMU</a:t>
+            </a:r>
+            <a:endParaRPr lang="zh-CN" altLang="en-US" dirty="0"/>
+          </a:p>
+        </p:txBody>
+      </p:sp>
+      <p:sp>
+        <p:nvSpPr>
+          <p:cNvPr id="7" name="矩形 6">
+            <a:extLst>
+              <a:ext uri="{FF2B5EF4-FFF2-40B4-BE49-F238E27FC236}">
+                <a16:creationId xmlns:a16="http://schemas.microsoft.com/office/drawing/2014/main" id="{802E7AEC-EDBC-B8E7-12E3-6BD0040366FF}"/>
+              </a:ext>
+            </a:extLst>
+          </p:cNvPr>
+          <p:cNvSpPr/>
+          <p:nvPr/>
+        </p:nvSpPr>
+        <p:spPr>
+          <a:xfrm>
+            <a:off x="7480898" y="4660985"/>
+            <a:ext cx="2019044" cy="533911"/>
+          </a:xfrm>
+          <a:prstGeom prst="rect">
+            <a:avLst/>
+          </a:prstGeom>
+          <a:ln/>
+        </p:spPr>
+        <p:style>
+          <a:lnRef idx="2">
+            <a:schemeClr val="accent4"/>
+          </a:lnRef>
+          <a:fillRef idx="1">
+            <a:schemeClr val="lt1"/>
+          </a:fillRef>
+          <a:effectRef idx="0">
+            <a:schemeClr val="accent4"/>
+          </a:effectRef>
+          <a:fontRef idx="minor">
+            <a:schemeClr val="dk1"/>
+          </a:fontRef>
+        </p:style>
+        <p:txBody>
+          <a:bodyPr rtlCol="0" anchor="ctr"/>
+          <a:lstStyle/>
+          <a:p>
+            <a:pPr algn="ctr"/>
+            <a:r>
+              <a:rPr lang="en-US" altLang="zh-CN" dirty="0"/>
+              <a:t>STM32H7</a:t>
+            </a:r>
+            <a:endParaRPr lang="zh-CN" altLang="en-US" dirty="0"/>
+          </a:p>
+        </p:txBody>
+      </p:sp>
+      <p:sp>
+        <p:nvSpPr>
+          <p:cNvPr id="8" name="矩形 7">
+            <a:extLst>
+              <a:ext uri="{FF2B5EF4-FFF2-40B4-BE49-F238E27FC236}">
+                <a16:creationId xmlns:a16="http://schemas.microsoft.com/office/drawing/2014/main" id="{1D377786-F779-590A-5A75-82913F0007C3}"/>
+              </a:ext>
+            </a:extLst>
+          </p:cNvPr>
+          <p:cNvSpPr/>
+          <p:nvPr/>
+        </p:nvSpPr>
+        <p:spPr>
+          <a:xfrm>
+            <a:off x="7480898" y="5393322"/>
+            <a:ext cx="2019044" cy="533911"/>
+          </a:xfrm>
+          <a:prstGeom prst="rect">
+            <a:avLst/>
+          </a:prstGeom>
+          <a:ln/>
+        </p:spPr>
+        <p:style>
+          <a:lnRef idx="2">
+            <a:schemeClr val="accent4"/>
+          </a:lnRef>
+          <a:fillRef idx="1">
+            <a:schemeClr val="lt1"/>
+          </a:fillRef>
+          <a:effectRef idx="0">
+            <a:schemeClr val="accent4"/>
+          </a:effectRef>
+          <a:fontRef idx="minor">
+            <a:schemeClr val="dk1"/>
+          </a:fontRef>
+        </p:style>
+        <p:txBody>
+          <a:bodyPr rtlCol="0" anchor="ctr"/>
+          <a:lstStyle/>
+          <a:p>
+            <a:pPr algn="ctr"/>
+            <a:r>
+              <a:rPr lang="zh-CN" altLang="en-US" dirty="0"/>
+              <a:t>无刷电机</a:t>
+            </a:r>
+            <a:r>
+              <a:rPr lang="en-US" altLang="zh-CN" dirty="0"/>
+              <a:t>*4</a:t>
+            </a:r>
+            <a:endParaRPr lang="zh-CN" altLang="en-US" dirty="0"/>
+          </a:p>
+        </p:txBody>
+      </p:sp>
+      <p:sp>
+        <p:nvSpPr>
+          <p:cNvPr id="9" name="矩形 8">
+            <a:extLst>
+              <a:ext uri="{FF2B5EF4-FFF2-40B4-BE49-F238E27FC236}">
+                <a16:creationId xmlns:a16="http://schemas.microsoft.com/office/drawing/2014/main" id="{F987E9DF-7F87-8A7E-C8A9-E74BBFFEC09B}"/>
+              </a:ext>
+            </a:extLst>
+          </p:cNvPr>
+          <p:cNvSpPr/>
+          <p:nvPr/>
+        </p:nvSpPr>
+        <p:spPr>
+          <a:xfrm>
+            <a:off x="9677912" y="2528408"/>
+            <a:ext cx="1294889" cy="484816"/>
+          </a:xfrm>
+          <a:prstGeom prst="rect">
+            <a:avLst/>
+          </a:prstGeom>
+          <a:solidFill>
+            <a:srgbClr val="C00000"/>
+          </a:solidFill>
+          <a:ln>
+            <a:noFill/>
+          </a:ln>
+        </p:spPr>
+        <p:style>
+          <a:lnRef idx="2">
+            <a:schemeClr val="accent1">
+              <a:shade val="15000"/>
+            </a:schemeClr>
+          </a:lnRef>
+          <a:fillRef idx="1">
+            <a:schemeClr val="accent1"/>
+          </a:fillRef>
+          <a:effectRef idx="0">
+            <a:schemeClr val="accent1"/>
+          </a:effectRef>
+          <a:fontRef idx="minor">
+            <a:schemeClr val="lt1"/>
+          </a:fontRef>
+        </p:style>
+        <p:txBody>
+          <a:bodyPr rtlCol="0" anchor="ctr"/>
+          <a:lstStyle/>
+          <a:p>
+            <a:pPr algn="ctr"/>
+            <a:r>
+              <a:rPr lang="en-US" altLang="zh-CN" dirty="0"/>
+              <a:t>12V 6W</a:t>
+            </a:r>
+            <a:endParaRPr lang="zh-CN" altLang="en-US" dirty="0"/>
+          </a:p>
+        </p:txBody>
+      </p:sp>
+      <p:sp>
+        <p:nvSpPr>
+          <p:cNvPr id="10" name="矩形 9">
+            <a:extLst>
+              <a:ext uri="{FF2B5EF4-FFF2-40B4-BE49-F238E27FC236}">
+                <a16:creationId xmlns:a16="http://schemas.microsoft.com/office/drawing/2014/main" id="{F33BD941-49BC-7677-246D-603FCDDCB3A6}"/>
+              </a:ext>
+            </a:extLst>
+          </p:cNvPr>
+          <p:cNvSpPr/>
+          <p:nvPr/>
+        </p:nvSpPr>
+        <p:spPr>
+          <a:xfrm>
+            <a:off x="9677912" y="3239267"/>
+            <a:ext cx="1294889" cy="484816"/>
+          </a:xfrm>
+          <a:prstGeom prst="rect">
+            <a:avLst/>
+          </a:prstGeom>
+          <a:solidFill>
+            <a:srgbClr val="C00000"/>
+          </a:solidFill>
+          <a:ln>
+            <a:noFill/>
+          </a:ln>
+        </p:spPr>
+        <p:style>
+          <a:lnRef idx="2">
+            <a:schemeClr val="accent1">
+              <a:shade val="15000"/>
+            </a:schemeClr>
+          </a:lnRef>
+          <a:fillRef idx="1">
+            <a:schemeClr val="accent1"/>
+          </a:fillRef>
+          <a:effectRef idx="0">
+            <a:schemeClr val="accent1"/>
+          </a:effectRef>
+          <a:fontRef idx="minor">
+            <a:schemeClr val="lt1"/>
+          </a:fontRef>
+        </p:style>
+        <p:txBody>
+          <a:bodyPr rtlCol="0" anchor="ctr"/>
+          <a:lstStyle/>
+          <a:p>
+            <a:pPr algn="ctr"/>
+            <a:r>
+              <a:rPr lang="en-US" altLang="zh-CN" dirty="0"/>
+              <a:t>5V 30W</a:t>
+            </a:r>
+            <a:endParaRPr lang="zh-CN" altLang="en-US" dirty="0"/>
+          </a:p>
+        </p:txBody>
+      </p:sp>
+      <p:sp>
+        <p:nvSpPr>
+          <p:cNvPr id="11" name="矩形 10">
+            <a:extLst>
+              <a:ext uri="{FF2B5EF4-FFF2-40B4-BE49-F238E27FC236}">
+                <a16:creationId xmlns:a16="http://schemas.microsoft.com/office/drawing/2014/main" id="{A93A4A9C-53D5-F6AB-67E2-1D5452B72869}"/>
+              </a:ext>
+            </a:extLst>
+          </p:cNvPr>
+          <p:cNvSpPr/>
+          <p:nvPr/>
+        </p:nvSpPr>
+        <p:spPr>
+          <a:xfrm>
+            <a:off x="9677912" y="3974673"/>
+            <a:ext cx="1294889" cy="484816"/>
+          </a:xfrm>
+          <a:prstGeom prst="rect">
+            <a:avLst/>
+          </a:prstGeom>
+          <a:solidFill>
+            <a:srgbClr val="C00000"/>
+          </a:solidFill>
+          <a:ln>
+            <a:noFill/>
+          </a:ln>
+        </p:spPr>
+        <p:style>
+          <a:lnRef idx="2">
+            <a:schemeClr val="accent1">
+              <a:shade val="15000"/>
+            </a:schemeClr>
+          </a:lnRef>
+          <a:fillRef idx="1">
+            <a:schemeClr val="accent1"/>
+          </a:fillRef>
+          <a:effectRef idx="0">
+            <a:schemeClr val="accent1"/>
+          </a:effectRef>
+          <a:fontRef idx="minor">
+            <a:schemeClr val="lt1"/>
+          </a:fontRef>
+        </p:style>
+        <p:txBody>
+          <a:bodyPr rtlCol="0" anchor="ctr"/>
+          <a:lstStyle/>
+          <a:p>
+            <a:pPr algn="ctr"/>
+            <a:r>
+              <a:rPr lang="en-US" altLang="zh-CN" dirty="0"/>
+              <a:t>5V 0.5A</a:t>
+            </a:r>
+            <a:endParaRPr lang="zh-CN" altLang="en-US" dirty="0"/>
+          </a:p>
+        </p:txBody>
+      </p:sp>
+      <p:sp>
+        <p:nvSpPr>
+          <p:cNvPr id="12" name="矩形 11">
+            <a:extLst>
+              <a:ext uri="{FF2B5EF4-FFF2-40B4-BE49-F238E27FC236}">
+                <a16:creationId xmlns:a16="http://schemas.microsoft.com/office/drawing/2014/main" id="{846DA21C-F6A9-B43B-2786-54E4A4FB7DD1}"/>
+              </a:ext>
+            </a:extLst>
+          </p:cNvPr>
+          <p:cNvSpPr/>
+          <p:nvPr/>
+        </p:nvSpPr>
+        <p:spPr>
+          <a:xfrm>
+            <a:off x="9677912" y="4660985"/>
+            <a:ext cx="1294889" cy="484816"/>
+          </a:xfrm>
+          <a:prstGeom prst="rect">
+            <a:avLst/>
+          </a:prstGeom>
+          <a:solidFill>
+            <a:srgbClr val="C00000"/>
+          </a:solidFill>
+          <a:ln>
+            <a:noFill/>
+          </a:ln>
+        </p:spPr>
+        <p:style>
+          <a:lnRef idx="2">
+            <a:schemeClr val="accent1">
+              <a:shade val="15000"/>
+            </a:schemeClr>
+          </a:lnRef>
+          <a:fillRef idx="1">
+            <a:schemeClr val="accent1"/>
+          </a:fillRef>
+          <a:effectRef idx="0">
+            <a:schemeClr val="accent1"/>
+          </a:effectRef>
+          <a:fontRef idx="minor">
+            <a:schemeClr val="lt1"/>
+          </a:fontRef>
+        </p:style>
+        <p:txBody>
+          <a:bodyPr rtlCol="0" anchor="ctr"/>
+          <a:lstStyle/>
+          <a:p>
+            <a:pPr algn="ctr"/>
+            <a:r>
+              <a:rPr lang="en-US" altLang="zh-CN" dirty="0"/>
+              <a:t>3.3V</a:t>
+            </a:r>
+            <a:endParaRPr lang="zh-CN" altLang="en-US" dirty="0"/>
+          </a:p>
+        </p:txBody>
+      </p:sp>
+      <p:sp>
+        <p:nvSpPr>
+          <p:cNvPr id="13" name="矩形 12">
+            <a:extLst>
+              <a:ext uri="{FF2B5EF4-FFF2-40B4-BE49-F238E27FC236}">
+                <a16:creationId xmlns:a16="http://schemas.microsoft.com/office/drawing/2014/main" id="{073F208F-10CA-EE00-9C04-EA6532B82792}"/>
+              </a:ext>
+            </a:extLst>
+          </p:cNvPr>
+          <p:cNvSpPr/>
+          <p:nvPr/>
+        </p:nvSpPr>
+        <p:spPr>
+          <a:xfrm>
+            <a:off x="9677912" y="5442417"/>
+            <a:ext cx="1294889" cy="484816"/>
+          </a:xfrm>
+          <a:prstGeom prst="rect">
+            <a:avLst/>
+          </a:prstGeom>
+          <a:solidFill>
+            <a:srgbClr val="C00000"/>
+          </a:solidFill>
+          <a:ln>
+            <a:noFill/>
+          </a:ln>
+        </p:spPr>
+        <p:style>
+          <a:lnRef idx="2">
+            <a:schemeClr val="accent1">
+              <a:shade val="15000"/>
+            </a:schemeClr>
+          </a:lnRef>
+          <a:fillRef idx="1">
+            <a:schemeClr val="accent1"/>
+          </a:fillRef>
+          <a:effectRef idx="0">
+            <a:schemeClr val="accent1"/>
+          </a:effectRef>
+          <a:fontRef idx="minor">
+            <a:schemeClr val="lt1"/>
+          </a:fontRef>
+        </p:style>
+        <p:txBody>
+          <a:bodyPr rtlCol="0" anchor="ctr"/>
+          <a:lstStyle/>
+          <a:p>
+            <a:pPr algn="ctr"/>
+            <a:r>
+              <a:rPr lang="en-US" altLang="zh-CN" dirty="0"/>
+              <a:t>24V</a:t>
+            </a:r>
+            <a:endParaRPr lang="zh-CN" altLang="en-US" dirty="0"/>
+          </a:p>
+        </p:txBody>
+      </p:sp>
+      <p:sp>
+        <p:nvSpPr>
+          <p:cNvPr id="14" name="矩形 13">
+            <a:extLst>
+              <a:ext uri="{FF2B5EF4-FFF2-40B4-BE49-F238E27FC236}">
+                <a16:creationId xmlns:a16="http://schemas.microsoft.com/office/drawing/2014/main" id="{C2345E26-6346-0C25-608F-E05086370A6B}"/>
+              </a:ext>
+            </a:extLst>
+          </p:cNvPr>
+          <p:cNvSpPr/>
+          <p:nvPr/>
+        </p:nvSpPr>
+        <p:spPr>
+          <a:xfrm>
+            <a:off x="202517" y="3280178"/>
+            <a:ext cx="1178287" cy="951221"/>
+          </a:xfrm>
+          <a:prstGeom prst="rect">
+            <a:avLst/>
+          </a:prstGeom>
+        </p:spPr>
+        <p:style>
+          <a:lnRef idx="2">
+            <a:schemeClr val="accent2">
+              <a:shade val="15000"/>
+            </a:schemeClr>
+          </a:lnRef>
+          <a:fillRef idx="1">
+            <a:schemeClr val="accent2"/>
+          </a:fillRef>
+          <a:effectRef idx="0">
+            <a:schemeClr val="accent2"/>
+          </a:effectRef>
+          <a:fontRef idx="minor">
+            <a:schemeClr val="lt1"/>
+          </a:fontRef>
+        </p:style>
+        <p:txBody>
+          <a:bodyPr rtlCol="0" anchor="ctr"/>
+          <a:lstStyle/>
+          <a:p>
+            <a:pPr algn="ctr"/>
+            <a:r>
+              <a:rPr lang="en-US" altLang="zh-CN" dirty="0"/>
+              <a:t>16V</a:t>
+            </a:r>
+          </a:p>
+          <a:p>
+            <a:pPr algn="ctr"/>
+            <a:r>
+              <a:rPr lang="zh-CN" altLang="en-US" dirty="0"/>
+              <a:t>锂电池</a:t>
+            </a:r>
+          </a:p>
+        </p:txBody>
+      </p:sp>
+      <p:sp>
+        <p:nvSpPr>
+          <p:cNvPr id="15" name="矩形 14">
+            <a:extLst>
+              <a:ext uri="{FF2B5EF4-FFF2-40B4-BE49-F238E27FC236}">
+                <a16:creationId xmlns:a16="http://schemas.microsoft.com/office/drawing/2014/main" id="{7DA03E51-2560-2748-2176-47BB12115809}"/>
+              </a:ext>
+            </a:extLst>
+          </p:cNvPr>
+          <p:cNvSpPr/>
+          <p:nvPr/>
+        </p:nvSpPr>
+        <p:spPr>
+          <a:xfrm>
+            <a:off x="1737768" y="3947056"/>
+            <a:ext cx="753819" cy="951221"/>
+          </a:xfrm>
+          <a:prstGeom prst="rect">
+            <a:avLst/>
+          </a:prstGeom>
+        </p:spPr>
+        <p:style>
+          <a:lnRef idx="2">
+            <a:schemeClr val="accent1">
+              <a:shade val="15000"/>
+            </a:schemeClr>
+          </a:lnRef>
+          <a:fillRef idx="1">
+            <a:schemeClr val="accent1"/>
+          </a:fillRef>
+          <a:effectRef idx="0">
+            <a:schemeClr val="accent1"/>
+          </a:effectRef>
+          <a:fontRef idx="minor">
+            <a:schemeClr val="lt1"/>
+          </a:fontRef>
+        </p:style>
+        <p:txBody>
+          <a:bodyPr rtlCol="0" anchor="ctr"/>
+          <a:lstStyle/>
+          <a:p>
+            <a:pPr algn="ctr"/>
+            <a:r>
+              <a:rPr lang="zh-CN" altLang="en-US" dirty="0"/>
+              <a:t>切换电路</a:t>
+            </a:r>
+          </a:p>
+        </p:txBody>
+      </p:sp>
+      <p:cxnSp>
+        <p:nvCxnSpPr>
+          <p:cNvPr id="17" name="直接箭头连接符 16">
+            <a:extLst>
+              <a:ext uri="{FF2B5EF4-FFF2-40B4-BE49-F238E27FC236}">
+                <a16:creationId xmlns:a16="http://schemas.microsoft.com/office/drawing/2014/main" id="{92276FF0-E9BE-0D5C-323B-AD7521E84577}"/>
+              </a:ext>
+            </a:extLst>
+          </p:cNvPr>
+          <p:cNvCxnSpPr>
+            <a:cxnSpLocks/>
+            <a:stCxn id="14" idx="3"/>
+            <a:endCxn id="15" idx="1"/>
+          </p:cNvCxnSpPr>
+          <p:nvPr/>
+        </p:nvCxnSpPr>
+        <p:spPr>
+          <a:xfrm>
+            <a:off x="1380804" y="3755789"/>
+            <a:ext cx="356964" cy="666878"/>
+          </a:xfrm>
+          <a:prstGeom prst="straightConnector1">
+            <a:avLst/>
+          </a:prstGeom>
+          <a:ln w="38100">
+            <a:tailEnd type="triangle"/>
+          </a:ln>
+        </p:spPr>
+        <p:style>
+          <a:lnRef idx="2">
+            <a:schemeClr val="dk1"/>
+          </a:lnRef>
+          <a:fillRef idx="0">
+            <a:schemeClr val="dk1"/>
+          </a:fillRef>
+          <a:effectRef idx="1">
+            <a:schemeClr val="dk1"/>
+          </a:effectRef>
+          <a:fontRef idx="minor">
+            <a:schemeClr val="tx1"/>
+          </a:fontRef>
+        </p:style>
+      </p:cxnSp>
+      <p:sp>
+        <p:nvSpPr>
+          <p:cNvPr id="25" name="矩形 24">
+            <a:extLst>
+              <a:ext uri="{FF2B5EF4-FFF2-40B4-BE49-F238E27FC236}">
+                <a16:creationId xmlns:a16="http://schemas.microsoft.com/office/drawing/2014/main" id="{C8028A71-C340-E258-58A8-9E1DF24F4857}"/>
+              </a:ext>
+            </a:extLst>
+          </p:cNvPr>
+          <p:cNvSpPr/>
+          <p:nvPr/>
+        </p:nvSpPr>
+        <p:spPr>
+          <a:xfrm>
+            <a:off x="202516" y="4422667"/>
+            <a:ext cx="1178287" cy="951221"/>
+          </a:xfrm>
+          <a:prstGeom prst="rect">
+            <a:avLst/>
+          </a:prstGeom>
+        </p:spPr>
+        <p:style>
+          <a:lnRef idx="2">
+            <a:schemeClr val="accent2">
+              <a:shade val="15000"/>
+            </a:schemeClr>
+          </a:lnRef>
+          <a:fillRef idx="1">
+            <a:schemeClr val="accent2"/>
+          </a:fillRef>
+          <a:effectRef idx="0">
+            <a:schemeClr val="accent2"/>
+          </a:effectRef>
+          <a:fontRef idx="minor">
+            <a:schemeClr val="lt1"/>
+          </a:fontRef>
+        </p:style>
+        <p:txBody>
+          <a:bodyPr rtlCol="0" anchor="ctr"/>
+          <a:lstStyle/>
+          <a:p>
+            <a:pPr algn="ctr"/>
+            <a:r>
+              <a:rPr lang="en-US" altLang="zh-CN" dirty="0"/>
+              <a:t>15V 3A</a:t>
+            </a:r>
+          </a:p>
+          <a:p>
+            <a:pPr algn="ctr"/>
+            <a:r>
+              <a:rPr lang="en-US" altLang="zh-CN" dirty="0"/>
+              <a:t>PD</a:t>
+            </a:r>
+            <a:r>
+              <a:rPr lang="zh-CN" altLang="en-US" dirty="0"/>
+              <a:t>供电</a:t>
+            </a:r>
+          </a:p>
+        </p:txBody>
+      </p:sp>
+      <p:cxnSp>
+        <p:nvCxnSpPr>
+          <p:cNvPr id="26" name="直接箭头连接符 25">
+            <a:extLst>
+              <a:ext uri="{FF2B5EF4-FFF2-40B4-BE49-F238E27FC236}">
+                <a16:creationId xmlns:a16="http://schemas.microsoft.com/office/drawing/2014/main" id="{9DD990ED-C8C9-A625-2758-1833A9C7C2E5}"/>
+              </a:ext>
+            </a:extLst>
+          </p:cNvPr>
+          <p:cNvCxnSpPr>
+            <a:cxnSpLocks/>
+            <a:stCxn id="25" idx="3"/>
+            <a:endCxn id="15" idx="1"/>
+          </p:cNvCxnSpPr>
+          <p:nvPr/>
+        </p:nvCxnSpPr>
+        <p:spPr>
+          <a:xfrm flipV="1">
+            <a:off x="1380803" y="4422667"/>
+            <a:ext cx="356965" cy="475611"/>
+          </a:xfrm>
+          <a:prstGeom prst="straightConnector1">
+            <a:avLst/>
+          </a:prstGeom>
+          <a:ln w="38100">
+            <a:tailEnd type="triangle"/>
+          </a:ln>
+        </p:spPr>
+        <p:style>
+          <a:lnRef idx="2">
+            <a:schemeClr val="dk1"/>
+          </a:lnRef>
+          <a:fillRef idx="0">
+            <a:schemeClr val="dk1"/>
+          </a:fillRef>
+          <a:effectRef idx="1">
+            <a:schemeClr val="dk1"/>
+          </a:effectRef>
+          <a:fontRef idx="minor">
+            <a:schemeClr val="tx1"/>
+          </a:fontRef>
+        </p:style>
+      </p:cxnSp>
+      <p:sp>
+        <p:nvSpPr>
+          <p:cNvPr id="32" name="矩形 31">
+            <a:extLst>
+              <a:ext uri="{FF2B5EF4-FFF2-40B4-BE49-F238E27FC236}">
+                <a16:creationId xmlns:a16="http://schemas.microsoft.com/office/drawing/2014/main" id="{F7C8109B-0271-F0EC-73CE-D850158A6B18}"/>
+              </a:ext>
+            </a:extLst>
+          </p:cNvPr>
+          <p:cNvSpPr/>
+          <p:nvPr/>
+        </p:nvSpPr>
+        <p:spPr>
+          <a:xfrm>
+            <a:off x="2916055" y="3947056"/>
+            <a:ext cx="944063" cy="951221"/>
+          </a:xfrm>
+          <a:prstGeom prst="rect">
+            <a:avLst/>
+          </a:prstGeom>
+        </p:spPr>
+        <p:style>
+          <a:lnRef idx="2">
+            <a:schemeClr val="accent1">
+              <a:shade val="15000"/>
+            </a:schemeClr>
+          </a:lnRef>
+          <a:fillRef idx="1">
+            <a:schemeClr val="accent1"/>
+          </a:fillRef>
+          <a:effectRef idx="0">
+            <a:schemeClr val="accent1"/>
+          </a:effectRef>
+          <a:fontRef idx="minor">
+            <a:schemeClr val="lt1"/>
+          </a:fontRef>
+        </p:style>
+        <p:txBody>
+          <a:bodyPr rtlCol="0" anchor="ctr"/>
+          <a:lstStyle/>
+          <a:p>
+            <a:pPr algn="ctr"/>
+            <a:r>
+              <a:rPr lang="zh-CN" altLang="en-US" dirty="0"/>
+              <a:t>缓启动</a:t>
+            </a:r>
+            <a:endParaRPr lang="en-US" altLang="zh-CN" dirty="0"/>
+          </a:p>
+          <a:p>
+            <a:pPr algn="ctr"/>
+            <a:r>
+              <a:rPr lang="zh-CN" altLang="en-US" dirty="0"/>
+              <a:t>防护</a:t>
+            </a:r>
+          </a:p>
+        </p:txBody>
+      </p:sp>
+      <p:cxnSp>
+        <p:nvCxnSpPr>
+          <p:cNvPr id="33" name="直接箭头连接符 32">
+            <a:extLst>
+              <a:ext uri="{FF2B5EF4-FFF2-40B4-BE49-F238E27FC236}">
+                <a16:creationId xmlns:a16="http://schemas.microsoft.com/office/drawing/2014/main" id="{F8519EB7-945C-2305-3D2C-FCF9D1AF2B05}"/>
+              </a:ext>
+            </a:extLst>
+          </p:cNvPr>
+          <p:cNvCxnSpPr>
+            <a:cxnSpLocks/>
+            <a:stCxn id="15" idx="3"/>
+            <a:endCxn id="32" idx="1"/>
+          </p:cNvCxnSpPr>
+          <p:nvPr/>
+        </p:nvCxnSpPr>
+        <p:spPr>
+          <a:xfrm>
+            <a:off x="2491587" y="4422667"/>
+            <a:ext cx="424468" cy="0"/>
+          </a:xfrm>
+          <a:prstGeom prst="straightConnector1">
+            <a:avLst/>
+          </a:prstGeom>
+          <a:ln w="38100">
+            <a:tailEnd type="triangle"/>
+          </a:ln>
+        </p:spPr>
+        <p:style>
+          <a:lnRef idx="2">
+            <a:schemeClr val="dk1"/>
+          </a:lnRef>
+          <a:fillRef idx="0">
+            <a:schemeClr val="dk1"/>
+          </a:fillRef>
+          <a:effectRef idx="1">
+            <a:schemeClr val="dk1"/>
+          </a:effectRef>
+          <a:fontRef idx="minor">
+            <a:schemeClr val="tx1"/>
+          </a:fontRef>
+        </p:style>
+      </p:cxnSp>
+      <p:sp>
+        <p:nvSpPr>
+          <p:cNvPr id="36" name="矩形 35">
+            <a:extLst>
+              <a:ext uri="{FF2B5EF4-FFF2-40B4-BE49-F238E27FC236}">
+                <a16:creationId xmlns:a16="http://schemas.microsoft.com/office/drawing/2014/main" id="{719D196B-55A3-D42B-5F31-10EDCFCBCE8D}"/>
+              </a:ext>
+            </a:extLst>
+          </p:cNvPr>
+          <p:cNvSpPr/>
+          <p:nvPr/>
+        </p:nvSpPr>
+        <p:spPr>
+          <a:xfrm>
+            <a:off x="4932032" y="2528408"/>
+            <a:ext cx="1474905" cy="533910"/>
+          </a:xfrm>
+          <a:prstGeom prst="rect">
+            <a:avLst/>
+          </a:prstGeom>
+        </p:spPr>
+        <p:style>
+          <a:lnRef idx="2">
+            <a:schemeClr val="accent1">
+              <a:shade val="15000"/>
+            </a:schemeClr>
+          </a:lnRef>
+          <a:fillRef idx="1">
+            <a:schemeClr val="accent1"/>
+          </a:fillRef>
+          <a:effectRef idx="0">
+            <a:schemeClr val="accent1"/>
+          </a:effectRef>
+          <a:fontRef idx="minor">
+            <a:schemeClr val="lt1"/>
+          </a:fontRef>
+        </p:style>
+        <p:txBody>
+          <a:bodyPr rtlCol="0" anchor="ctr"/>
+          <a:lstStyle/>
+          <a:p>
+            <a:pPr algn="ctr"/>
+            <a:r>
+              <a:rPr lang="en-US" altLang="zh-CN" dirty="0"/>
+              <a:t>MP9943</a:t>
+            </a:r>
+          </a:p>
+          <a:p>
+            <a:pPr algn="ctr"/>
+            <a:r>
+              <a:rPr lang="en-US" altLang="zh-CN" dirty="0"/>
+              <a:t>16V~12V</a:t>
+            </a:r>
+            <a:endParaRPr lang="zh-CN" altLang="en-US" dirty="0"/>
+          </a:p>
+        </p:txBody>
+      </p:sp>
+      <p:sp>
+        <p:nvSpPr>
+          <p:cNvPr id="37" name="矩形 36">
+            <a:extLst>
+              <a:ext uri="{FF2B5EF4-FFF2-40B4-BE49-F238E27FC236}">
+                <a16:creationId xmlns:a16="http://schemas.microsoft.com/office/drawing/2014/main" id="{A7ED4E5C-DBA3-46D6-9B8E-3B97E03942BD}"/>
+              </a:ext>
+            </a:extLst>
+          </p:cNvPr>
+          <p:cNvSpPr/>
+          <p:nvPr/>
+        </p:nvSpPr>
+        <p:spPr>
+          <a:xfrm>
+            <a:off x="4932032" y="3261773"/>
+            <a:ext cx="1474905" cy="533910"/>
+          </a:xfrm>
+          <a:prstGeom prst="rect">
+            <a:avLst/>
+          </a:prstGeom>
+        </p:spPr>
+        <p:style>
+          <a:lnRef idx="2">
+            <a:schemeClr val="accent1">
+              <a:shade val="15000"/>
+            </a:schemeClr>
+          </a:lnRef>
+          <a:fillRef idx="1">
+            <a:schemeClr val="accent1"/>
+          </a:fillRef>
+          <a:effectRef idx="0">
+            <a:schemeClr val="accent1"/>
+          </a:effectRef>
+          <a:fontRef idx="minor">
+            <a:schemeClr val="lt1"/>
+          </a:fontRef>
+        </p:style>
+        <p:txBody>
+          <a:bodyPr rtlCol="0" anchor="ctr"/>
+          <a:lstStyle/>
+          <a:p>
+            <a:pPr algn="ctr"/>
+            <a:r>
+              <a:rPr lang="en-US" altLang="zh-CN" dirty="0"/>
+              <a:t>TPS5450</a:t>
+            </a:r>
+          </a:p>
+          <a:p>
+            <a:pPr algn="ctr"/>
+            <a:r>
+              <a:rPr lang="en-US" altLang="zh-CN" dirty="0"/>
+              <a:t>16V~5V</a:t>
+            </a:r>
+            <a:endParaRPr lang="zh-CN" altLang="en-US" dirty="0"/>
+          </a:p>
+        </p:txBody>
+      </p:sp>
+      <p:sp>
+        <p:nvSpPr>
+          <p:cNvPr id="38" name="矩形 37">
+            <a:extLst>
+              <a:ext uri="{FF2B5EF4-FFF2-40B4-BE49-F238E27FC236}">
+                <a16:creationId xmlns:a16="http://schemas.microsoft.com/office/drawing/2014/main" id="{17DC5E8F-3C39-FD3C-48D6-92ED3878AE4A}"/>
+              </a:ext>
+            </a:extLst>
+          </p:cNvPr>
+          <p:cNvSpPr/>
+          <p:nvPr/>
+        </p:nvSpPr>
+        <p:spPr>
+          <a:xfrm>
+            <a:off x="4932032" y="4660986"/>
+            <a:ext cx="1474905" cy="533910"/>
+          </a:xfrm>
+          <a:prstGeom prst="rect">
+            <a:avLst/>
+          </a:prstGeom>
+        </p:spPr>
+        <p:style>
+          <a:lnRef idx="2">
+            <a:schemeClr val="accent1">
+              <a:shade val="15000"/>
+            </a:schemeClr>
+          </a:lnRef>
+          <a:fillRef idx="1">
+            <a:schemeClr val="accent1"/>
+          </a:fillRef>
+          <a:effectRef idx="0">
+            <a:schemeClr val="accent1"/>
+          </a:effectRef>
+          <a:fontRef idx="minor">
+            <a:schemeClr val="lt1"/>
+          </a:fontRef>
+        </p:style>
+        <p:txBody>
+          <a:bodyPr rtlCol="0" anchor="ctr"/>
+          <a:lstStyle/>
+          <a:p>
+            <a:pPr algn="ctr"/>
+            <a:r>
+              <a:rPr lang="en-US" altLang="zh-CN" dirty="0"/>
+              <a:t>AMS1117</a:t>
+            </a:r>
+          </a:p>
+          <a:p>
+            <a:pPr algn="ctr"/>
+            <a:r>
+              <a:rPr lang="en-US" altLang="zh-CN" dirty="0"/>
+              <a:t>5V~3.3V</a:t>
+            </a:r>
+            <a:endParaRPr lang="zh-CN" altLang="en-US" dirty="0"/>
+          </a:p>
+        </p:txBody>
+      </p:sp>
+      <p:cxnSp>
+        <p:nvCxnSpPr>
+          <p:cNvPr id="40" name="连接符: 肘形 39">
+            <a:extLst>
+              <a:ext uri="{FF2B5EF4-FFF2-40B4-BE49-F238E27FC236}">
+                <a16:creationId xmlns:a16="http://schemas.microsoft.com/office/drawing/2014/main" id="{B3BAA6EE-F2B9-287F-26EA-F37749A2F5FA}"/>
+              </a:ext>
+            </a:extLst>
+          </p:cNvPr>
+          <p:cNvCxnSpPr>
+            <a:cxnSpLocks/>
+          </p:cNvCxnSpPr>
+          <p:nvPr/>
+        </p:nvCxnSpPr>
+        <p:spPr>
+          <a:xfrm flipV="1">
+            <a:off x="3860117" y="2795362"/>
+            <a:ext cx="1071914" cy="1627304"/>
+          </a:xfrm>
+          <a:prstGeom prst="bentConnector3">
+            <a:avLst/>
+          </a:prstGeom>
+          <a:ln w="28575">
+            <a:solidFill>
+              <a:schemeClr val="tx1"/>
+            </a:solidFill>
+            <a:tailEnd type="triangle"/>
+          </a:ln>
+        </p:spPr>
+        <p:style>
+          <a:lnRef idx="2">
+            <a:schemeClr val="accent1"/>
+          </a:lnRef>
+          <a:fillRef idx="0">
+            <a:schemeClr val="accent1"/>
+          </a:fillRef>
+          <a:effectRef idx="1">
+            <a:schemeClr val="accent1"/>
+          </a:effectRef>
+          <a:fontRef idx="minor">
+            <a:schemeClr val="tx1"/>
+          </a:fontRef>
+        </p:style>
+      </p:cxnSp>
+      <p:cxnSp>
+        <p:nvCxnSpPr>
+          <p:cNvPr id="43" name="连接符: 肘形 42">
+            <a:extLst>
+              <a:ext uri="{FF2B5EF4-FFF2-40B4-BE49-F238E27FC236}">
+                <a16:creationId xmlns:a16="http://schemas.microsoft.com/office/drawing/2014/main" id="{9C0A4EE8-EA6B-E960-10DA-C1C8FABB8A21}"/>
+              </a:ext>
+            </a:extLst>
+          </p:cNvPr>
+          <p:cNvCxnSpPr>
+            <a:cxnSpLocks/>
+            <a:stCxn id="32" idx="2"/>
+            <a:endCxn id="8" idx="1"/>
+          </p:cNvCxnSpPr>
+          <p:nvPr/>
+        </p:nvCxnSpPr>
+        <p:spPr>
+          <a:xfrm rot="16200000" flipH="1">
+            <a:off x="5053492" y="3232871"/>
+            <a:ext cx="762001" cy="4092811"/>
+          </a:xfrm>
+          <a:prstGeom prst="bentConnector2">
+            <a:avLst/>
+          </a:prstGeom>
+          <a:ln w="38100">
+            <a:solidFill>
+              <a:schemeClr val="tx1"/>
+            </a:solidFill>
+            <a:tailEnd type="triangle"/>
+          </a:ln>
+        </p:spPr>
+        <p:style>
+          <a:lnRef idx="2">
+            <a:schemeClr val="accent1"/>
+          </a:lnRef>
+          <a:fillRef idx="0">
+            <a:schemeClr val="accent1"/>
+          </a:fillRef>
+          <a:effectRef idx="1">
+            <a:schemeClr val="accent1"/>
+          </a:effectRef>
+          <a:fontRef idx="minor">
+            <a:schemeClr val="tx1"/>
+          </a:fontRef>
+        </p:style>
+      </p:cxnSp>
+      <p:cxnSp>
+        <p:nvCxnSpPr>
+          <p:cNvPr id="45" name="直接箭头连接符 44">
+            <a:extLst>
+              <a:ext uri="{FF2B5EF4-FFF2-40B4-BE49-F238E27FC236}">
+                <a16:creationId xmlns:a16="http://schemas.microsoft.com/office/drawing/2014/main" id="{6B23F89C-FE2E-BFD6-3DF0-9B91889F33D1}"/>
+              </a:ext>
+            </a:extLst>
+          </p:cNvPr>
+          <p:cNvCxnSpPr>
+            <a:cxnSpLocks/>
+            <a:endCxn id="37" idx="1"/>
+          </p:cNvCxnSpPr>
+          <p:nvPr/>
+        </p:nvCxnSpPr>
+        <p:spPr>
+          <a:xfrm>
+            <a:off x="4418577" y="3528728"/>
+            <a:ext cx="513455" cy="0"/>
+          </a:xfrm>
+          <a:prstGeom prst="straightConnector1">
+            <a:avLst/>
+          </a:prstGeom>
+          <a:ln w="38100">
+            <a:tailEnd type="triangle"/>
+          </a:ln>
+        </p:spPr>
+        <p:style>
+          <a:lnRef idx="2">
+            <a:schemeClr val="dk1"/>
+          </a:lnRef>
+          <a:fillRef idx="0">
+            <a:schemeClr val="dk1"/>
+          </a:fillRef>
+          <a:effectRef idx="1">
+            <a:schemeClr val="dk1"/>
+          </a:effectRef>
+          <a:fontRef idx="minor">
+            <a:schemeClr val="tx1"/>
+          </a:fontRef>
+        </p:style>
+      </p:cxnSp>
+      <p:cxnSp>
+        <p:nvCxnSpPr>
+          <p:cNvPr id="49" name="直接箭头连接符 48">
+            <a:extLst>
+              <a:ext uri="{FF2B5EF4-FFF2-40B4-BE49-F238E27FC236}">
+                <a16:creationId xmlns:a16="http://schemas.microsoft.com/office/drawing/2014/main" id="{7A30D47B-72FF-B482-3BDD-777F4B1EBC97}"/>
+              </a:ext>
+            </a:extLst>
+          </p:cNvPr>
+          <p:cNvCxnSpPr>
+            <a:cxnSpLocks/>
+            <a:stCxn id="37" idx="2"/>
+            <a:endCxn id="38" idx="0"/>
+          </p:cNvCxnSpPr>
+          <p:nvPr/>
+        </p:nvCxnSpPr>
+        <p:spPr>
+          <a:xfrm>
+            <a:off x="5669485" y="3795683"/>
+            <a:ext cx="0" cy="865303"/>
+          </a:xfrm>
+          <a:prstGeom prst="straightConnector1">
+            <a:avLst/>
+          </a:prstGeom>
+          <a:ln w="38100">
+            <a:tailEnd type="triangle"/>
+          </a:ln>
+        </p:spPr>
+        <p:style>
+          <a:lnRef idx="2">
+            <a:schemeClr val="dk1"/>
+          </a:lnRef>
+          <a:fillRef idx="0">
+            <a:schemeClr val="dk1"/>
+          </a:fillRef>
+          <a:effectRef idx="1">
+            <a:schemeClr val="dk1"/>
+          </a:effectRef>
+          <a:fontRef idx="minor">
+            <a:schemeClr val="tx1"/>
+          </a:fontRef>
+        </p:style>
+      </p:cxnSp>
+      <p:cxnSp>
+        <p:nvCxnSpPr>
+          <p:cNvPr id="53" name="直接箭头连接符 52">
+            <a:extLst>
+              <a:ext uri="{FF2B5EF4-FFF2-40B4-BE49-F238E27FC236}">
+                <a16:creationId xmlns:a16="http://schemas.microsoft.com/office/drawing/2014/main" id="{53633589-8968-0F9A-0FBF-21DBCE71BBA5}"/>
+              </a:ext>
+            </a:extLst>
+          </p:cNvPr>
+          <p:cNvCxnSpPr>
+            <a:cxnSpLocks/>
+            <a:stCxn id="38" idx="3"/>
+            <a:endCxn id="7" idx="1"/>
+          </p:cNvCxnSpPr>
+          <p:nvPr/>
+        </p:nvCxnSpPr>
+        <p:spPr>
+          <a:xfrm>
+            <a:off x="6406937" y="4927941"/>
+            <a:ext cx="1073961" cy="0"/>
+          </a:xfrm>
+          <a:prstGeom prst="straightConnector1">
+            <a:avLst/>
+          </a:prstGeom>
+          <a:ln w="38100">
+            <a:tailEnd type="triangle"/>
+          </a:ln>
+        </p:spPr>
+        <p:style>
+          <a:lnRef idx="2">
+            <a:schemeClr val="dk1"/>
+          </a:lnRef>
+          <a:fillRef idx="0">
+            <a:schemeClr val="dk1"/>
+          </a:fillRef>
+          <a:effectRef idx="1">
+            <a:schemeClr val="dk1"/>
+          </a:effectRef>
+          <a:fontRef idx="minor">
+            <a:schemeClr val="tx1"/>
+          </a:fontRef>
+        </p:style>
+      </p:cxnSp>
+      <p:cxnSp>
+        <p:nvCxnSpPr>
+          <p:cNvPr id="59" name="直接箭头连接符 58">
+            <a:extLst>
+              <a:ext uri="{FF2B5EF4-FFF2-40B4-BE49-F238E27FC236}">
+                <a16:creationId xmlns:a16="http://schemas.microsoft.com/office/drawing/2014/main" id="{2C60DC8A-0A30-AD1D-5249-4C1DD198239B}"/>
+              </a:ext>
+            </a:extLst>
+          </p:cNvPr>
+          <p:cNvCxnSpPr>
+            <a:cxnSpLocks/>
+            <a:stCxn id="36" idx="3"/>
+            <a:endCxn id="4" idx="1"/>
+          </p:cNvCxnSpPr>
+          <p:nvPr/>
+        </p:nvCxnSpPr>
+        <p:spPr>
+          <a:xfrm>
+            <a:off x="6406937" y="2795363"/>
+            <a:ext cx="1073961" cy="1"/>
+          </a:xfrm>
+          <a:prstGeom prst="straightConnector1">
+            <a:avLst/>
+          </a:prstGeom>
+          <a:ln w="38100">
+            <a:tailEnd type="triangle"/>
+          </a:ln>
+        </p:spPr>
+        <p:style>
+          <a:lnRef idx="2">
+            <a:schemeClr val="dk1"/>
+          </a:lnRef>
+          <a:fillRef idx="0">
+            <a:schemeClr val="dk1"/>
+          </a:fillRef>
+          <a:effectRef idx="1">
+            <a:schemeClr val="dk1"/>
+          </a:effectRef>
+          <a:fontRef idx="minor">
+            <a:schemeClr val="tx1"/>
+          </a:fontRef>
+        </p:style>
+      </p:cxnSp>
+      <p:cxnSp>
+        <p:nvCxnSpPr>
+          <p:cNvPr id="62" name="直接箭头连接符 61">
+            <a:extLst>
+              <a:ext uri="{FF2B5EF4-FFF2-40B4-BE49-F238E27FC236}">
+                <a16:creationId xmlns:a16="http://schemas.microsoft.com/office/drawing/2014/main" id="{21D8B806-D30A-F62D-50C0-531A6EC0D818}"/>
+              </a:ext>
+            </a:extLst>
+          </p:cNvPr>
+          <p:cNvCxnSpPr>
+            <a:cxnSpLocks/>
+          </p:cNvCxnSpPr>
+          <p:nvPr/>
+        </p:nvCxnSpPr>
+        <p:spPr>
+          <a:xfrm>
+            <a:off x="6406937" y="3537927"/>
+            <a:ext cx="1073961" cy="1"/>
+          </a:xfrm>
+          <a:prstGeom prst="straightConnector1">
+            <a:avLst/>
+          </a:prstGeom>
+          <a:ln w="38100">
+            <a:tailEnd type="triangle"/>
+          </a:ln>
+        </p:spPr>
+        <p:style>
+          <a:lnRef idx="2">
+            <a:schemeClr val="dk1"/>
+          </a:lnRef>
+          <a:fillRef idx="0">
+            <a:schemeClr val="dk1"/>
+          </a:fillRef>
+          <a:effectRef idx="1">
+            <a:schemeClr val="dk1"/>
+          </a:effectRef>
+          <a:fontRef idx="minor">
+            <a:schemeClr val="tx1"/>
+          </a:fontRef>
+        </p:style>
+      </p:cxnSp>
+      <p:cxnSp>
+        <p:nvCxnSpPr>
+          <p:cNvPr id="64" name="连接符: 肘形 63">
+            <a:extLst>
+              <a:ext uri="{FF2B5EF4-FFF2-40B4-BE49-F238E27FC236}">
+                <a16:creationId xmlns:a16="http://schemas.microsoft.com/office/drawing/2014/main" id="{469AFC96-045A-4FEF-702D-25010D385226}"/>
+              </a:ext>
+            </a:extLst>
+          </p:cNvPr>
+          <p:cNvCxnSpPr>
+            <a:cxnSpLocks/>
+            <a:stCxn id="37" idx="3"/>
+            <a:endCxn id="6" idx="1"/>
+          </p:cNvCxnSpPr>
+          <p:nvPr/>
+        </p:nvCxnSpPr>
+        <p:spPr>
+          <a:xfrm>
+            <a:off x="6406937" y="3528728"/>
+            <a:ext cx="1073961" cy="688354"/>
+          </a:xfrm>
+          <a:prstGeom prst="bentConnector3">
+            <a:avLst>
+              <a:gd name="adj1" fmla="val 50000"/>
+            </a:avLst>
+          </a:prstGeom>
+          <a:ln w="28575">
+            <a:solidFill>
+              <a:schemeClr val="tx1"/>
+            </a:solidFill>
+            <a:tailEnd type="triangle"/>
+          </a:ln>
+        </p:spPr>
+        <p:style>
+          <a:lnRef idx="2">
+            <a:schemeClr val="accent1"/>
+          </a:lnRef>
+          <a:fillRef idx="0">
+            <a:schemeClr val="accent1"/>
+          </a:fillRef>
+          <a:effectRef idx="1">
+            <a:schemeClr val="accent1"/>
+          </a:effectRef>
+          <a:fontRef idx="minor">
+            <a:schemeClr val="tx1"/>
+          </a:fontRef>
+        </p:style>
+      </p:cxnSp>
+    </p:spTree>
+    <p:extLst>
+      <p:ext uri="{BB962C8B-B14F-4D97-AF65-F5344CB8AC3E}">
+        <p14:creationId xmlns:p14="http://schemas.microsoft.com/office/powerpoint/2010/main" val="2754440899"/>
       </p:ext>
     </p:extLst>
   </p:cSld>
